--- a/2025-CSI-PPT-Template.pptx
+++ b/2025-CSI-PPT-Template.pptx
@@ -156,6 +156,43 @@
 </p:presentation>
 </file>
 
+<file path=ppt/changesInfos/changesInfo1.xml><?xml version="1.0" encoding="utf-8"?>
+<pc:chgInfo xmlns:a="http://schemas.openxmlformats.org/drawingml/2006/main" xmlns:r="http://schemas.openxmlformats.org/officeDocument/2006/relationships" xmlns:ac="http://schemas.microsoft.com/office/drawing/2013/main/command" xmlns:pc="http://schemas.microsoft.com/office/powerpoint/2013/main/command">
+  <pc:docChgLst>
+    <pc:chgData name="James L. Gilmore" userId="3d60d20b-672a-4f5d-b5e0-b3454f3fe04c" providerId="ADAL" clId="{AF697304-D9BA-40BA-9B09-E0738E6CEC26}"/>
+    <pc:docChg chg="custSel modSld">
+      <pc:chgData name="James L. Gilmore" userId="3d60d20b-672a-4f5d-b5e0-b3454f3fe04c" providerId="ADAL" clId="{AF697304-D9BA-40BA-9B09-E0738E6CEC26}" dt="2026-03-01T10:45:27.871" v="0" actId="478"/>
+      <pc:docMkLst>
+        <pc:docMk/>
+      </pc:docMkLst>
+      <pc:sldChg chg="addSp delSp modSp mod">
+        <pc:chgData name="James L. Gilmore" userId="3d60d20b-672a-4f5d-b5e0-b3454f3fe04c" providerId="ADAL" clId="{AF697304-D9BA-40BA-9B09-E0738E6CEC26}" dt="2026-03-01T10:45:27.871" v="0" actId="478"/>
+        <pc:sldMkLst>
+          <pc:docMk/>
+          <pc:sldMk cId="619194086" sldId="258"/>
+        </pc:sldMkLst>
+        <pc:spChg chg="del">
+          <ac:chgData name="James L. Gilmore" userId="3d60d20b-672a-4f5d-b5e0-b3454f3fe04c" providerId="ADAL" clId="{AF697304-D9BA-40BA-9B09-E0738E6CEC26}" dt="2026-03-01T10:45:27.871" v="0" actId="478"/>
+          <ac:spMkLst>
+            <pc:docMk/>
+            <pc:sldMk cId="619194086" sldId="258"/>
+            <ac:spMk id="2" creationId="{BED5E5D6-586C-BD7E-62CC-3F7A0E8AC40F}"/>
+          </ac:spMkLst>
+        </pc:spChg>
+        <pc:spChg chg="add mod">
+          <ac:chgData name="James L. Gilmore" userId="3d60d20b-672a-4f5d-b5e0-b3454f3fe04c" providerId="ADAL" clId="{AF697304-D9BA-40BA-9B09-E0738E6CEC26}" dt="2026-03-01T10:45:27.871" v="0" actId="478"/>
+          <ac:spMkLst>
+            <pc:docMk/>
+            <pc:sldMk cId="619194086" sldId="258"/>
+            <ac:spMk id="5" creationId="{19FE3266-BEF1-10DA-8F12-622D82F0D88F}"/>
+          </ac:spMkLst>
+        </pc:spChg>
+      </pc:sldChg>
+    </pc:docChg>
+  </pc:docChgLst>
+</pc:chgInfo>
+</file>
+
 <file path=ppt/handoutMasters/handoutMaster1.xml><?xml version="1.0" encoding="utf-8"?>
 <p:handoutMaster xmlns:a="http://schemas.openxmlformats.org/drawingml/2006/main" xmlns:r="http://schemas.openxmlformats.org/officeDocument/2006/relationships" xmlns:p="http://schemas.openxmlformats.org/presentationml/2006/main">
   <p:cSld>
@@ -250,7 +287,7 @@
           <a:p>
             <a:fld id="{2D6AA5BE-D582-8A4A-8BD3-1195F697F428}" type="datetimeFigureOut">
               <a:rPr lang="en-US" smtClean="0"/>
-              <a:t>2/28/2026</a:t>
+              <a:t>3/1/2026</a:t>
             </a:fld>
             <a:endParaRPr lang="en-US"/>
           </a:p>
@@ -427,7 +464,7 @@
           <a:p>
             <a:fld id="{9C01462A-D6E8-7F45-AB1E-8353870150FA}" type="datetimeFigureOut">
               <a:rPr lang="en-US" smtClean="0"/>
-              <a:t>2/28/2026</a:t>
+              <a:t>3/1/2026</a:t>
             </a:fld>
             <a:endParaRPr lang="en-US"/>
           </a:p>
@@ -6284,6 +6321,632 @@
 </p:sldLayout>
 </file>
 
+<file path=ppt/slideLayouts/slideLayout18.xml><?xml version="1.0" encoding="utf-8"?>
+<p:sldLayout xmlns:a="http://schemas.openxmlformats.org/drawingml/2006/main" xmlns:r="http://schemas.openxmlformats.org/officeDocument/2006/relationships" xmlns:p="http://schemas.openxmlformats.org/presentationml/2006/main" preserve="1" userDrawn="1">
+  <p:cSld name="1_Title Slide_RPE">
+    <p:bg>
+      <p:bgPr>
+        <a:solidFill>
+          <a:schemeClr val="tx2"/>
+        </a:solidFill>
+        <a:effectLst/>
+      </p:bgPr>
+    </p:bg>
+    <p:spTree>
+      <p:nvGrpSpPr>
+        <p:cNvPr id="1" name=""/>
+        <p:cNvGrpSpPr/>
+        <p:nvPr/>
+      </p:nvGrpSpPr>
+      <p:grpSpPr>
+        <a:xfrm>
+          <a:off x="0" y="0"/>
+          <a:ext cx="0" cy="0"/>
+          <a:chOff x="0" y="0"/>
+          <a:chExt cx="0" cy="0"/>
+        </a:xfrm>
+      </p:grpSpPr>
+      <p:sp>
+        <p:nvSpPr>
+          <p:cNvPr id="2" name="Title 1">
+            <a:extLst>
+              <a:ext uri="{FF2B5EF4-FFF2-40B4-BE49-F238E27FC236}">
+                <a16:creationId xmlns:a16="http://schemas.microsoft.com/office/drawing/2014/main" id="{89C1B05F-027C-3F55-54CD-69C6DDB46B0A}"/>
+              </a:ext>
+            </a:extLst>
+          </p:cNvPr>
+          <p:cNvSpPr>
+            <a:spLocks noGrp="1"/>
+          </p:cNvSpPr>
+          <p:nvPr>
+            <p:ph type="ctrTitle" hasCustomPrompt="1"/>
+          </p:nvPr>
+        </p:nvSpPr>
+        <p:spPr>
+          <a:xfrm>
+            <a:off x="1189059" y="1122363"/>
+            <a:ext cx="10537804" cy="3410560"/>
+          </a:xfrm>
+        </p:spPr>
+        <p:txBody>
+          <a:bodyPr anchor="t">
+            <a:noAutofit/>
+          </a:bodyPr>
+          <a:lstStyle>
+            <a:lvl1pPr algn="l">
+              <a:lnSpc>
+                <a:spcPts val="8500"/>
+              </a:lnSpc>
+              <a:defRPr sz="8800" spc="-150">
+                <a:solidFill>
+                  <a:schemeClr val="bg1"/>
+                </a:solidFill>
+              </a:defRPr>
+            </a:lvl1pPr>
+          </a:lstStyle>
+          <a:p>
+            <a:r>
+              <a:rPr lang="en-US" dirty="0">
+                <a:solidFill>
+                  <a:srgbClr val="F8971D"/>
+                </a:solidFill>
+              </a:rPr>
+              <a:t>R</a:t>
+            </a:r>
+            <a:r>
+              <a:rPr lang="en-US" dirty="0"/>
+              <a:t>etail</a:t>
+            </a:r>
+            <a:br>
+              <a:rPr lang="en-US" dirty="0"/>
+            </a:br>
+            <a:r>
+              <a:rPr lang="en-US" dirty="0">
+                <a:solidFill>
+                  <a:srgbClr val="F8971D"/>
+                </a:solidFill>
+              </a:rPr>
+              <a:t>P</a:t>
+            </a:r>
+            <a:r>
+              <a:rPr lang="en-US" dirty="0"/>
+              <a:t>erformance</a:t>
+            </a:r>
+            <a:br>
+              <a:rPr lang="en-US" dirty="0"/>
+            </a:br>
+            <a:r>
+              <a:rPr lang="en-US" dirty="0">
+                <a:solidFill>
+                  <a:srgbClr val="F8971D"/>
+                </a:solidFill>
+              </a:rPr>
+              <a:t>E</a:t>
+            </a:r>
+            <a:r>
+              <a:rPr lang="en-US" dirty="0"/>
+              <a:t>ngine</a:t>
+            </a:r>
+          </a:p>
+        </p:txBody>
+      </p:sp>
+      <p:sp>
+        <p:nvSpPr>
+          <p:cNvPr id="3" name="Subtitle 2">
+            <a:extLst>
+              <a:ext uri="{FF2B5EF4-FFF2-40B4-BE49-F238E27FC236}">
+                <a16:creationId xmlns:a16="http://schemas.microsoft.com/office/drawing/2014/main" id="{78D283AD-6372-B546-4F85-318DE6EEDCAF}"/>
+              </a:ext>
+            </a:extLst>
+          </p:cNvPr>
+          <p:cNvSpPr>
+            <a:spLocks noGrp="1"/>
+          </p:cNvSpPr>
+          <p:nvPr>
+            <p:ph type="subTitle" idx="1" hasCustomPrompt="1"/>
+          </p:nvPr>
+        </p:nvSpPr>
+        <p:spPr>
+          <a:xfrm>
+            <a:off x="1285712" y="6350487"/>
+            <a:ext cx="10134601" cy="409821"/>
+          </a:xfrm>
+        </p:spPr>
+        <p:txBody>
+          <a:bodyPr/>
+          <a:lstStyle>
+            <a:lvl1pPr marL="0" indent="0" algn="l">
+              <a:buNone/>
+              <a:defRPr sz="2400">
+                <a:solidFill>
+                  <a:schemeClr val="bg1"/>
+                </a:solidFill>
+              </a:defRPr>
+            </a:lvl1pPr>
+            <a:lvl2pPr marL="457200" indent="0" algn="ctr">
+              <a:buNone/>
+              <a:defRPr sz="2000"/>
+            </a:lvl2pPr>
+            <a:lvl3pPr marL="914400" indent="0" algn="ctr">
+              <a:buNone/>
+              <a:defRPr sz="1800"/>
+            </a:lvl3pPr>
+            <a:lvl4pPr marL="1371600" indent="0" algn="ctr">
+              <a:buNone/>
+              <a:defRPr sz="1600"/>
+            </a:lvl4pPr>
+            <a:lvl5pPr marL="1828800" indent="0" algn="ctr">
+              <a:buNone/>
+              <a:defRPr sz="1600"/>
+            </a:lvl5pPr>
+            <a:lvl6pPr marL="2286000" indent="0" algn="ctr">
+              <a:buNone/>
+              <a:defRPr sz="1600"/>
+            </a:lvl6pPr>
+            <a:lvl7pPr marL="2743200" indent="0" algn="ctr">
+              <a:buNone/>
+              <a:defRPr sz="1600"/>
+            </a:lvl7pPr>
+            <a:lvl8pPr marL="3200400" indent="0" algn="ctr">
+              <a:buNone/>
+              <a:defRPr sz="1600"/>
+            </a:lvl8pPr>
+            <a:lvl9pPr marL="3657600" indent="0" algn="ctr">
+              <a:buNone/>
+              <a:defRPr sz="1600"/>
+            </a:lvl9pPr>
+          </a:lstStyle>
+          <a:p>
+            <a:r>
+              <a:rPr lang="en-US" dirty="0"/>
+              <a:t>Click to Edit Master Subtitle Style</a:t>
+            </a:r>
+          </a:p>
+        </p:txBody>
+      </p:sp>
+      <p:pic>
+        <p:nvPicPr>
+          <p:cNvPr id="6" name="Picture 5">
+            <a:extLst>
+              <a:ext uri="{FF2B5EF4-FFF2-40B4-BE49-F238E27FC236}">
+                <a16:creationId xmlns:a16="http://schemas.microsoft.com/office/drawing/2014/main" id="{8985BFFC-1E54-050A-66BC-4C794FAD44C1}"/>
+              </a:ext>
+            </a:extLst>
+          </p:cNvPr>
+          <p:cNvPicPr>
+            <a:picLocks noChangeAspect="1"/>
+          </p:cNvPicPr>
+          <p:nvPr userDrawn="1"/>
+        </p:nvPicPr>
+        <p:blipFill>
+          <a:blip r:embed="rId2" cstate="screen">
+            <a:extLst>
+              <a:ext uri="{28A0092B-C50C-407E-A947-70E740481C1C}">
+                <a14:useLocalDpi xmlns:a14="http://schemas.microsoft.com/office/drawing/2010/main"/>
+              </a:ext>
+            </a:extLst>
+          </a:blip>
+          <a:stretch>
+            <a:fillRect/>
+          </a:stretch>
+        </p:blipFill>
+        <p:spPr>
+          <a:xfrm>
+            <a:off x="10846108" y="6125481"/>
+            <a:ext cx="1265881" cy="737095"/>
+          </a:xfrm>
+          <a:prstGeom prst="rect">
+            <a:avLst/>
+          </a:prstGeom>
+        </p:spPr>
+      </p:pic>
+      <p:sp>
+        <p:nvSpPr>
+          <p:cNvPr id="10" name="Rectangle 9">
+            <a:extLst>
+              <a:ext uri="{FF2B5EF4-FFF2-40B4-BE49-F238E27FC236}">
+                <a16:creationId xmlns:a16="http://schemas.microsoft.com/office/drawing/2014/main" id="{1BAC5A45-3D11-1E15-B8DB-E264584D3295}"/>
+              </a:ext>
+            </a:extLst>
+          </p:cNvPr>
+          <p:cNvSpPr/>
+          <p:nvPr userDrawn="1"/>
+        </p:nvSpPr>
+        <p:spPr>
+          <a:xfrm>
+            <a:off x="0" y="0"/>
+            <a:ext cx="457200" cy="6858000"/>
+          </a:xfrm>
+          <a:prstGeom prst="rect">
+            <a:avLst/>
+          </a:prstGeom>
+          <a:gradFill>
+            <a:gsLst>
+              <a:gs pos="100000">
+                <a:schemeClr val="accent2"/>
+              </a:gs>
+              <a:gs pos="0">
+                <a:schemeClr val="accent3"/>
+              </a:gs>
+            </a:gsLst>
+            <a:lin ang="5400000" scaled="1"/>
+          </a:gradFill>
+          <a:ln>
+            <a:noFill/>
+          </a:ln>
+        </p:spPr>
+        <p:style>
+          <a:lnRef idx="2">
+            <a:schemeClr val="accent1">
+              <a:shade val="15000"/>
+            </a:schemeClr>
+          </a:lnRef>
+          <a:fillRef idx="1">
+            <a:schemeClr val="accent1"/>
+          </a:fillRef>
+          <a:effectRef idx="0">
+            <a:schemeClr val="accent1"/>
+          </a:effectRef>
+          <a:fontRef idx="minor">
+            <a:schemeClr val="lt1"/>
+          </a:fontRef>
+        </p:style>
+        <p:txBody>
+          <a:bodyPr rtlCol="0" anchor="ctr"/>
+          <a:lstStyle/>
+          <a:p>
+            <a:pPr algn="ctr"/>
+            <a:endParaRPr lang="en-US"/>
+          </a:p>
+        </p:txBody>
+      </p:sp>
+    </p:spTree>
+    <p:extLst>
+      <p:ext uri="{BB962C8B-B14F-4D97-AF65-F5344CB8AC3E}">
+        <p14:creationId xmlns:p14="http://schemas.microsoft.com/office/powerpoint/2010/main" val="2920393903"/>
+      </p:ext>
+    </p:extLst>
+  </p:cSld>
+  <p:clrMapOvr>
+    <a:masterClrMapping/>
+  </p:clrMapOvr>
+  <p:extLst>
+    <p:ext uri="{DCECCB84-F9BA-43D5-87BE-67443E8EF086}">
+      <p15:sldGuideLst xmlns:p15="http://schemas.microsoft.com/office/powerpoint/2012/main">
+        <p15:guide id="1" orient="horz" pos="2160" userDrawn="1">
+          <p15:clr>
+            <a:srgbClr val="FBAE40"/>
+          </p15:clr>
+        </p15:guide>
+        <p15:guide id="2" orient="horz" pos="2613" userDrawn="1">
+          <p15:clr>
+            <a:srgbClr val="FBAE40"/>
+          </p15:clr>
+        </p15:guide>
+        <p15:guide id="3" orient="horz" pos="1212" userDrawn="1">
+          <p15:clr>
+            <a:srgbClr val="FBAE40"/>
+          </p15:clr>
+        </p15:guide>
+      </p15:sldGuideLst>
+    </p:ext>
+  </p:extLst>
+</p:sldLayout>
+</file>
+
+<file path=ppt/slideLayouts/slideLayout19.xml><?xml version="1.0" encoding="utf-8"?>
+<p:sldLayout xmlns:a="http://schemas.openxmlformats.org/drawingml/2006/main" xmlns:r="http://schemas.openxmlformats.org/officeDocument/2006/relationships" xmlns:p="http://schemas.openxmlformats.org/presentationml/2006/main" preserve="1" userDrawn="1">
+  <p:cSld name="4_Title Slide_ARS">
+    <p:bg>
+      <p:bgPr>
+        <a:solidFill>
+          <a:schemeClr val="tx2"/>
+        </a:solidFill>
+        <a:effectLst/>
+      </p:bgPr>
+    </p:bg>
+    <p:spTree>
+      <p:nvGrpSpPr>
+        <p:cNvPr id="1" name=""/>
+        <p:cNvGrpSpPr/>
+        <p:nvPr/>
+      </p:nvGrpSpPr>
+      <p:grpSpPr>
+        <a:xfrm>
+          <a:off x="0" y="0"/>
+          <a:ext cx="0" cy="0"/>
+          <a:chOff x="0" y="0"/>
+          <a:chExt cx="0" cy="0"/>
+        </a:xfrm>
+      </p:grpSpPr>
+      <p:sp>
+        <p:nvSpPr>
+          <p:cNvPr id="2" name="Title 1">
+            <a:extLst>
+              <a:ext uri="{FF2B5EF4-FFF2-40B4-BE49-F238E27FC236}">
+                <a16:creationId xmlns:a16="http://schemas.microsoft.com/office/drawing/2014/main" id="{89C1B05F-027C-3F55-54CD-69C6DDB46B0A}"/>
+              </a:ext>
+            </a:extLst>
+          </p:cNvPr>
+          <p:cNvSpPr>
+            <a:spLocks noGrp="1"/>
+          </p:cNvSpPr>
+          <p:nvPr>
+            <p:ph type="ctrTitle" hasCustomPrompt="1"/>
+          </p:nvPr>
+        </p:nvSpPr>
+        <p:spPr>
+          <a:xfrm>
+            <a:off x="1189059" y="1122363"/>
+            <a:ext cx="10537804" cy="3410560"/>
+          </a:xfrm>
+        </p:spPr>
+        <p:txBody>
+          <a:bodyPr anchor="t">
+            <a:noAutofit/>
+          </a:bodyPr>
+          <a:lstStyle>
+            <a:lvl1pPr algn="l">
+              <a:lnSpc>
+                <a:spcPts val="8500"/>
+              </a:lnSpc>
+              <a:defRPr sz="8800" spc="-150">
+                <a:solidFill>
+                  <a:schemeClr val="bg1"/>
+                </a:solidFill>
+              </a:defRPr>
+            </a:lvl1pPr>
+          </a:lstStyle>
+          <a:p>
+            <a:r>
+              <a:rPr lang="en-US" dirty="0">
+                <a:solidFill>
+                  <a:srgbClr val="F8971D"/>
+                </a:solidFill>
+              </a:rPr>
+              <a:t>A</a:t>
+            </a:r>
+            <a:r>
+              <a:rPr lang="en-US" dirty="0"/>
+              <a:t>ccount </a:t>
+            </a:r>
+            <a:br>
+              <a:rPr lang="en-US" dirty="0"/>
+            </a:br>
+            <a:r>
+              <a:rPr lang="en-US" dirty="0">
+                <a:solidFill>
+                  <a:srgbClr val="F8971D"/>
+                </a:solidFill>
+              </a:rPr>
+              <a:t>R</a:t>
+            </a:r>
+            <a:r>
+              <a:rPr lang="en-US" dirty="0"/>
+              <a:t>evenue</a:t>
+            </a:r>
+            <a:br>
+              <a:rPr lang="en-US" dirty="0"/>
+            </a:br>
+            <a:r>
+              <a:rPr lang="en-US" dirty="0">
+                <a:solidFill>
+                  <a:srgbClr val="F8971D"/>
+                </a:solidFill>
+              </a:rPr>
+              <a:t>S</a:t>
+            </a:r>
+            <a:r>
+              <a:rPr lang="en-US" dirty="0"/>
+              <a:t>olution</a:t>
+            </a:r>
+          </a:p>
+        </p:txBody>
+      </p:sp>
+      <p:sp>
+        <p:nvSpPr>
+          <p:cNvPr id="3" name="Subtitle 2">
+            <a:extLst>
+              <a:ext uri="{FF2B5EF4-FFF2-40B4-BE49-F238E27FC236}">
+                <a16:creationId xmlns:a16="http://schemas.microsoft.com/office/drawing/2014/main" id="{78D283AD-6372-B546-4F85-318DE6EEDCAF}"/>
+              </a:ext>
+            </a:extLst>
+          </p:cNvPr>
+          <p:cNvSpPr>
+            <a:spLocks noGrp="1"/>
+          </p:cNvSpPr>
+          <p:nvPr>
+            <p:ph type="subTitle" idx="1" hasCustomPrompt="1"/>
+          </p:nvPr>
+        </p:nvSpPr>
+        <p:spPr>
+          <a:xfrm>
+            <a:off x="1285712" y="6350487"/>
+            <a:ext cx="10134601" cy="409821"/>
+          </a:xfrm>
+        </p:spPr>
+        <p:txBody>
+          <a:bodyPr/>
+          <a:lstStyle>
+            <a:lvl1pPr marL="0" indent="0" algn="l">
+              <a:buNone/>
+              <a:defRPr sz="2400">
+                <a:solidFill>
+                  <a:schemeClr val="bg1"/>
+                </a:solidFill>
+              </a:defRPr>
+            </a:lvl1pPr>
+            <a:lvl2pPr marL="457200" indent="0" algn="ctr">
+              <a:buNone/>
+              <a:defRPr sz="2000"/>
+            </a:lvl2pPr>
+            <a:lvl3pPr marL="914400" indent="0" algn="ctr">
+              <a:buNone/>
+              <a:defRPr sz="1800"/>
+            </a:lvl3pPr>
+            <a:lvl4pPr marL="1371600" indent="0" algn="ctr">
+              <a:buNone/>
+              <a:defRPr sz="1600"/>
+            </a:lvl4pPr>
+            <a:lvl5pPr marL="1828800" indent="0" algn="ctr">
+              <a:buNone/>
+              <a:defRPr sz="1600"/>
+            </a:lvl5pPr>
+            <a:lvl6pPr marL="2286000" indent="0" algn="ctr">
+              <a:buNone/>
+              <a:defRPr sz="1600"/>
+            </a:lvl6pPr>
+            <a:lvl7pPr marL="2743200" indent="0" algn="ctr">
+              <a:buNone/>
+              <a:defRPr sz="1600"/>
+            </a:lvl7pPr>
+            <a:lvl8pPr marL="3200400" indent="0" algn="ctr">
+              <a:buNone/>
+              <a:defRPr sz="1600"/>
+            </a:lvl8pPr>
+            <a:lvl9pPr marL="3657600" indent="0" algn="ctr">
+              <a:buNone/>
+              <a:defRPr sz="1600"/>
+            </a:lvl9pPr>
+          </a:lstStyle>
+          <a:p>
+            <a:r>
+              <a:rPr lang="en-US" dirty="0"/>
+              <a:t>Click to Edit Master Subtitle Style</a:t>
+            </a:r>
+          </a:p>
+        </p:txBody>
+      </p:sp>
+      <p:pic>
+        <p:nvPicPr>
+          <p:cNvPr id="6" name="Picture 5">
+            <a:extLst>
+              <a:ext uri="{FF2B5EF4-FFF2-40B4-BE49-F238E27FC236}">
+                <a16:creationId xmlns:a16="http://schemas.microsoft.com/office/drawing/2014/main" id="{8985BFFC-1E54-050A-66BC-4C794FAD44C1}"/>
+              </a:ext>
+            </a:extLst>
+          </p:cNvPr>
+          <p:cNvPicPr>
+            <a:picLocks noChangeAspect="1"/>
+          </p:cNvPicPr>
+          <p:nvPr userDrawn="1"/>
+        </p:nvPicPr>
+        <p:blipFill>
+          <a:blip r:embed="rId2" cstate="screen">
+            <a:extLst>
+              <a:ext uri="{28A0092B-C50C-407E-A947-70E740481C1C}">
+                <a14:useLocalDpi xmlns:a14="http://schemas.microsoft.com/office/drawing/2010/main"/>
+              </a:ext>
+            </a:extLst>
+          </a:blip>
+          <a:stretch>
+            <a:fillRect/>
+          </a:stretch>
+        </p:blipFill>
+        <p:spPr>
+          <a:xfrm>
+            <a:off x="10846108" y="6125481"/>
+            <a:ext cx="1265881" cy="737095"/>
+          </a:xfrm>
+          <a:prstGeom prst="rect">
+            <a:avLst/>
+          </a:prstGeom>
+        </p:spPr>
+      </p:pic>
+      <p:sp>
+        <p:nvSpPr>
+          <p:cNvPr id="10" name="Rectangle 9">
+            <a:extLst>
+              <a:ext uri="{FF2B5EF4-FFF2-40B4-BE49-F238E27FC236}">
+                <a16:creationId xmlns:a16="http://schemas.microsoft.com/office/drawing/2014/main" id="{1BAC5A45-3D11-1E15-B8DB-E264584D3295}"/>
+              </a:ext>
+            </a:extLst>
+          </p:cNvPr>
+          <p:cNvSpPr/>
+          <p:nvPr userDrawn="1"/>
+        </p:nvSpPr>
+        <p:spPr>
+          <a:xfrm>
+            <a:off x="0" y="0"/>
+            <a:ext cx="457200" cy="6858000"/>
+          </a:xfrm>
+          <a:prstGeom prst="rect">
+            <a:avLst/>
+          </a:prstGeom>
+          <a:gradFill>
+            <a:gsLst>
+              <a:gs pos="100000">
+                <a:schemeClr val="accent2"/>
+              </a:gs>
+              <a:gs pos="0">
+                <a:schemeClr val="accent3"/>
+              </a:gs>
+            </a:gsLst>
+            <a:lin ang="5400000" scaled="1"/>
+          </a:gradFill>
+          <a:ln>
+            <a:noFill/>
+          </a:ln>
+        </p:spPr>
+        <p:style>
+          <a:lnRef idx="2">
+            <a:schemeClr val="accent1">
+              <a:shade val="15000"/>
+            </a:schemeClr>
+          </a:lnRef>
+          <a:fillRef idx="1">
+            <a:schemeClr val="accent1"/>
+          </a:fillRef>
+          <a:effectRef idx="0">
+            <a:schemeClr val="accent1"/>
+          </a:effectRef>
+          <a:fontRef idx="minor">
+            <a:schemeClr val="lt1"/>
+          </a:fontRef>
+        </p:style>
+        <p:txBody>
+          <a:bodyPr rtlCol="0" anchor="ctr"/>
+          <a:lstStyle/>
+          <a:p>
+            <a:pPr algn="ctr"/>
+            <a:endParaRPr lang="en-US"/>
+          </a:p>
+        </p:txBody>
+      </p:sp>
+    </p:spTree>
+    <p:extLst>
+      <p:ext uri="{BB962C8B-B14F-4D97-AF65-F5344CB8AC3E}">
+        <p14:creationId xmlns:p14="http://schemas.microsoft.com/office/powerpoint/2010/main" val="3185382703"/>
+      </p:ext>
+    </p:extLst>
+  </p:cSld>
+  <p:clrMapOvr>
+    <a:masterClrMapping/>
+  </p:clrMapOvr>
+  <p:extLst>
+    <p:ext uri="{DCECCB84-F9BA-43D5-87BE-67443E8EF086}">
+      <p15:sldGuideLst xmlns:p15="http://schemas.microsoft.com/office/powerpoint/2012/main">
+        <p15:guide id="1" orient="horz" pos="2160" userDrawn="1">
+          <p15:clr>
+            <a:srgbClr val="FBAE40"/>
+          </p15:clr>
+        </p15:guide>
+        <p15:guide id="2" orient="horz" pos="2613" userDrawn="1">
+          <p15:clr>
+            <a:srgbClr val="FBAE40"/>
+          </p15:clr>
+        </p15:guide>
+        <p15:guide id="3" orient="horz" pos="1212" userDrawn="1">
+          <p15:clr>
+            <a:srgbClr val="FBAE40"/>
+          </p15:clr>
+        </p15:guide>
+      </p15:sldGuideLst>
+    </p:ext>
+  </p:extLst>
+</p:sldLayout>
+</file>
+
 <file path=ppt/slideLayouts/slideLayout2.xml><?xml version="1.0" encoding="utf-8"?>
 <p:sldLayout xmlns:a="http://schemas.openxmlformats.org/drawingml/2006/main" xmlns:r="http://schemas.openxmlformats.org/officeDocument/2006/relationships" xmlns:p="http://schemas.openxmlformats.org/presentationml/2006/main" type="title" preserve="1">
   <p:cSld name="Title Slide_Reverse">
@@ -6529,6 +7192,319 @@
     <p:extLst>
       <p:ext uri="{BB962C8B-B14F-4D97-AF65-F5344CB8AC3E}">
         <p14:creationId xmlns:p14="http://schemas.microsoft.com/office/powerpoint/2010/main" val="1645092312"/>
+      </p:ext>
+    </p:extLst>
+  </p:cSld>
+  <p:clrMapOvr>
+    <a:masterClrMapping/>
+  </p:clrMapOvr>
+  <p:extLst>
+    <p:ext uri="{DCECCB84-F9BA-43D5-87BE-67443E8EF086}">
+      <p15:sldGuideLst xmlns:p15="http://schemas.microsoft.com/office/powerpoint/2012/main">
+        <p15:guide id="1" orient="horz" pos="2160" userDrawn="1">
+          <p15:clr>
+            <a:srgbClr val="FBAE40"/>
+          </p15:clr>
+        </p15:guide>
+        <p15:guide id="2" orient="horz" pos="2613" userDrawn="1">
+          <p15:clr>
+            <a:srgbClr val="FBAE40"/>
+          </p15:clr>
+        </p15:guide>
+        <p15:guide id="3" orient="horz" pos="1212" userDrawn="1">
+          <p15:clr>
+            <a:srgbClr val="FBAE40"/>
+          </p15:clr>
+        </p15:guide>
+      </p15:sldGuideLst>
+    </p:ext>
+  </p:extLst>
+</p:sldLayout>
+</file>
+
+<file path=ppt/slideLayouts/slideLayout20.xml><?xml version="1.0" encoding="utf-8"?>
+<p:sldLayout xmlns:a="http://schemas.openxmlformats.org/drawingml/2006/main" xmlns:r="http://schemas.openxmlformats.org/officeDocument/2006/relationships" xmlns:p="http://schemas.openxmlformats.org/presentationml/2006/main" preserve="1" userDrawn="1">
+  <p:cSld name="5_Title Slide_ICS">
+    <p:bg>
+      <p:bgPr>
+        <a:solidFill>
+          <a:schemeClr val="tx2"/>
+        </a:solidFill>
+        <a:effectLst/>
+      </p:bgPr>
+    </p:bg>
+    <p:spTree>
+      <p:nvGrpSpPr>
+        <p:cNvPr id="1" name=""/>
+        <p:cNvGrpSpPr/>
+        <p:nvPr/>
+      </p:nvGrpSpPr>
+      <p:grpSpPr>
+        <a:xfrm>
+          <a:off x="0" y="0"/>
+          <a:ext cx="0" cy="0"/>
+          <a:chOff x="0" y="0"/>
+          <a:chExt cx="0" cy="0"/>
+        </a:xfrm>
+      </p:grpSpPr>
+      <p:sp>
+        <p:nvSpPr>
+          <p:cNvPr id="2" name="Title 1">
+            <a:extLst>
+              <a:ext uri="{FF2B5EF4-FFF2-40B4-BE49-F238E27FC236}">
+                <a16:creationId xmlns:a16="http://schemas.microsoft.com/office/drawing/2014/main" id="{89C1B05F-027C-3F55-54CD-69C6DDB46B0A}"/>
+              </a:ext>
+            </a:extLst>
+          </p:cNvPr>
+          <p:cNvSpPr>
+            <a:spLocks noGrp="1"/>
+          </p:cNvSpPr>
+          <p:nvPr>
+            <p:ph type="ctrTitle" hasCustomPrompt="1"/>
+          </p:nvPr>
+        </p:nvSpPr>
+        <p:spPr>
+          <a:xfrm>
+            <a:off x="1189059" y="1122363"/>
+            <a:ext cx="10537804" cy="3410560"/>
+          </a:xfrm>
+        </p:spPr>
+        <p:txBody>
+          <a:bodyPr anchor="t">
+            <a:noAutofit/>
+          </a:bodyPr>
+          <a:lstStyle>
+            <a:lvl1pPr algn="l">
+              <a:lnSpc>
+                <a:spcPts val="8500"/>
+              </a:lnSpc>
+              <a:defRPr sz="8800" spc="-150">
+                <a:solidFill>
+                  <a:schemeClr val="bg1"/>
+                </a:solidFill>
+              </a:defRPr>
+            </a:lvl1pPr>
+          </a:lstStyle>
+          <a:p>
+            <a:r>
+              <a:rPr lang="en-US" dirty="0">
+                <a:solidFill>
+                  <a:srgbClr val="F8971D"/>
+                </a:solidFill>
+              </a:rPr>
+              <a:t>I</a:t>
+            </a:r>
+            <a:r>
+              <a:rPr lang="en-US" dirty="0"/>
+              <a:t>nvitation</a:t>
+            </a:r>
+            <a:br>
+              <a:rPr lang="en-US" dirty="0"/>
+            </a:br>
+            <a:r>
+              <a:rPr lang="en-US" dirty="0">
+                <a:solidFill>
+                  <a:srgbClr val="F8971D"/>
+                </a:solidFill>
+              </a:rPr>
+              <a:t>C</a:t>
+            </a:r>
+            <a:r>
+              <a:rPr lang="en-US" dirty="0"/>
+              <a:t>hecking</a:t>
+            </a:r>
+            <a:br>
+              <a:rPr lang="en-US" dirty="0"/>
+            </a:br>
+            <a:r>
+              <a:rPr lang="en-US" dirty="0">
+                <a:solidFill>
+                  <a:srgbClr val="F8971D"/>
+                </a:solidFill>
+              </a:rPr>
+              <a:t>S</a:t>
+            </a:r>
+            <a:r>
+              <a:rPr lang="en-US" dirty="0"/>
+              <a:t>ystem</a:t>
+            </a:r>
+          </a:p>
+        </p:txBody>
+      </p:sp>
+      <p:sp>
+        <p:nvSpPr>
+          <p:cNvPr id="3" name="Subtitle 2">
+            <a:extLst>
+              <a:ext uri="{FF2B5EF4-FFF2-40B4-BE49-F238E27FC236}">
+                <a16:creationId xmlns:a16="http://schemas.microsoft.com/office/drawing/2014/main" id="{78D283AD-6372-B546-4F85-318DE6EEDCAF}"/>
+              </a:ext>
+            </a:extLst>
+          </p:cNvPr>
+          <p:cNvSpPr>
+            <a:spLocks noGrp="1"/>
+          </p:cNvSpPr>
+          <p:nvPr>
+            <p:ph type="subTitle" idx="1" hasCustomPrompt="1"/>
+          </p:nvPr>
+        </p:nvSpPr>
+        <p:spPr>
+          <a:xfrm>
+            <a:off x="1285712" y="6350487"/>
+            <a:ext cx="10134601" cy="409821"/>
+          </a:xfrm>
+        </p:spPr>
+        <p:txBody>
+          <a:bodyPr/>
+          <a:lstStyle>
+            <a:lvl1pPr marL="0" indent="0" algn="l">
+              <a:buNone/>
+              <a:defRPr sz="2400">
+                <a:solidFill>
+                  <a:schemeClr val="bg1"/>
+                </a:solidFill>
+              </a:defRPr>
+            </a:lvl1pPr>
+            <a:lvl2pPr marL="457200" indent="0" algn="ctr">
+              <a:buNone/>
+              <a:defRPr sz="2000"/>
+            </a:lvl2pPr>
+            <a:lvl3pPr marL="914400" indent="0" algn="ctr">
+              <a:buNone/>
+              <a:defRPr sz="1800"/>
+            </a:lvl3pPr>
+            <a:lvl4pPr marL="1371600" indent="0" algn="ctr">
+              <a:buNone/>
+              <a:defRPr sz="1600"/>
+            </a:lvl4pPr>
+            <a:lvl5pPr marL="1828800" indent="0" algn="ctr">
+              <a:buNone/>
+              <a:defRPr sz="1600"/>
+            </a:lvl5pPr>
+            <a:lvl6pPr marL="2286000" indent="0" algn="ctr">
+              <a:buNone/>
+              <a:defRPr sz="1600"/>
+            </a:lvl6pPr>
+            <a:lvl7pPr marL="2743200" indent="0" algn="ctr">
+              <a:buNone/>
+              <a:defRPr sz="1600"/>
+            </a:lvl7pPr>
+            <a:lvl8pPr marL="3200400" indent="0" algn="ctr">
+              <a:buNone/>
+              <a:defRPr sz="1600"/>
+            </a:lvl8pPr>
+            <a:lvl9pPr marL="3657600" indent="0" algn="ctr">
+              <a:buNone/>
+              <a:defRPr sz="1600"/>
+            </a:lvl9pPr>
+          </a:lstStyle>
+          <a:p>
+            <a:r>
+              <a:rPr lang="en-US" dirty="0"/>
+              <a:t>Click to Edit Master Subtitle Style</a:t>
+            </a:r>
+          </a:p>
+        </p:txBody>
+      </p:sp>
+      <p:pic>
+        <p:nvPicPr>
+          <p:cNvPr id="6" name="Picture 5">
+            <a:extLst>
+              <a:ext uri="{FF2B5EF4-FFF2-40B4-BE49-F238E27FC236}">
+                <a16:creationId xmlns:a16="http://schemas.microsoft.com/office/drawing/2014/main" id="{8985BFFC-1E54-050A-66BC-4C794FAD44C1}"/>
+              </a:ext>
+            </a:extLst>
+          </p:cNvPr>
+          <p:cNvPicPr>
+            <a:picLocks noChangeAspect="1"/>
+          </p:cNvPicPr>
+          <p:nvPr userDrawn="1"/>
+        </p:nvPicPr>
+        <p:blipFill>
+          <a:blip r:embed="rId2" cstate="screen">
+            <a:extLst>
+              <a:ext uri="{28A0092B-C50C-407E-A947-70E740481C1C}">
+                <a14:useLocalDpi xmlns:a14="http://schemas.microsoft.com/office/drawing/2010/main"/>
+              </a:ext>
+            </a:extLst>
+          </a:blip>
+          <a:stretch>
+            <a:fillRect/>
+          </a:stretch>
+        </p:blipFill>
+        <p:spPr>
+          <a:xfrm>
+            <a:off x="10846108" y="6125481"/>
+            <a:ext cx="1265881" cy="737095"/>
+          </a:xfrm>
+          <a:prstGeom prst="rect">
+            <a:avLst/>
+          </a:prstGeom>
+        </p:spPr>
+      </p:pic>
+      <p:sp>
+        <p:nvSpPr>
+          <p:cNvPr id="10" name="Rectangle 9">
+            <a:extLst>
+              <a:ext uri="{FF2B5EF4-FFF2-40B4-BE49-F238E27FC236}">
+                <a16:creationId xmlns:a16="http://schemas.microsoft.com/office/drawing/2014/main" id="{1BAC5A45-3D11-1E15-B8DB-E264584D3295}"/>
+              </a:ext>
+            </a:extLst>
+          </p:cNvPr>
+          <p:cNvSpPr/>
+          <p:nvPr userDrawn="1"/>
+        </p:nvSpPr>
+        <p:spPr>
+          <a:xfrm>
+            <a:off x="0" y="0"/>
+            <a:ext cx="457200" cy="6858000"/>
+          </a:xfrm>
+          <a:prstGeom prst="rect">
+            <a:avLst/>
+          </a:prstGeom>
+          <a:gradFill>
+            <a:gsLst>
+              <a:gs pos="100000">
+                <a:schemeClr val="accent2"/>
+              </a:gs>
+              <a:gs pos="0">
+                <a:schemeClr val="accent3"/>
+              </a:gs>
+            </a:gsLst>
+            <a:lin ang="5400000" scaled="1"/>
+          </a:gradFill>
+          <a:ln>
+            <a:noFill/>
+          </a:ln>
+        </p:spPr>
+        <p:style>
+          <a:lnRef idx="2">
+            <a:schemeClr val="accent1">
+              <a:shade val="15000"/>
+            </a:schemeClr>
+          </a:lnRef>
+          <a:fillRef idx="1">
+            <a:schemeClr val="accent1"/>
+          </a:fillRef>
+          <a:effectRef idx="0">
+            <a:schemeClr val="accent1"/>
+          </a:effectRef>
+          <a:fontRef idx="minor">
+            <a:schemeClr val="lt1"/>
+          </a:fontRef>
+        </p:style>
+        <p:txBody>
+          <a:bodyPr rtlCol="0" anchor="ctr"/>
+          <a:lstStyle/>
+          <a:p>
+            <a:pPr algn="ctr"/>
+            <a:endParaRPr lang="en-US"/>
+          </a:p>
+        </p:txBody>
+      </p:sp>
+    </p:spTree>
+    <p:extLst>
+      <p:ext uri="{BB962C8B-B14F-4D97-AF65-F5344CB8AC3E}">
+        <p14:creationId xmlns:p14="http://schemas.microsoft.com/office/powerpoint/2010/main" val="1184525277"/>
       </p:ext>
     </p:extLst>
   </p:cSld>
@@ -9374,6 +10350,9 @@
     <p:sldLayoutId id="2147483657" r:id="rId15"/>
     <p:sldLayoutId id="2147483672" r:id="rId16"/>
     <p:sldLayoutId id="2147483673" r:id="rId17"/>
+    <p:sldLayoutId id="2147483674" r:id="rId18"/>
+    <p:sldLayoutId id="2147483677" r:id="rId19"/>
+    <p:sldLayoutId id="2147483678" r:id="rId20"/>
   </p:sldLayoutIdLst>
   <p:hf hdr="0" dt="0"/>
   <p:txStyles>
@@ -9729,48 +10708,6 @@
       </p:grpSpPr>
       <p:sp>
         <p:nvSpPr>
-          <p:cNvPr id="2" name="Title 1">
-            <a:extLst>
-              <a:ext uri="{FF2B5EF4-FFF2-40B4-BE49-F238E27FC236}">
-                <a16:creationId xmlns:a16="http://schemas.microsoft.com/office/drawing/2014/main" id="{BED5E5D6-586C-BD7E-62CC-3F7A0E8AC40F}"/>
-              </a:ext>
-            </a:extLst>
-          </p:cNvPr>
-          <p:cNvSpPr>
-            <a:spLocks noGrp="1"/>
-          </p:cNvSpPr>
-          <p:nvPr>
-            <p:ph type="ctrTitle"/>
-          </p:nvPr>
-        </p:nvSpPr>
-        <p:spPr>
-          <a:xfrm>
-            <a:off x="1189059" y="1122363"/>
-            <a:ext cx="10469564" cy="2387600"/>
-          </a:xfrm>
-        </p:spPr>
-        <p:txBody>
-          <a:bodyPr>
-            <a:noAutofit/>
-          </a:bodyPr>
-          <a:lstStyle/>
-          <a:p>
-            <a:r>
-              <a:rPr lang="en-US"/>
-              <a:t>Title Slide for</a:t>
-            </a:r>
-            <a:br>
-              <a:rPr lang="en-US"/>
-            </a:br>
-            <a:r>
-              <a:rPr lang="en-US"/>
-              <a:t>Presentation</a:t>
-            </a:r>
-          </a:p>
-        </p:txBody>
-      </p:sp>
-      <p:sp>
-        <p:nvSpPr>
           <p:cNvPr id="3" name="Subtitle 2">
             <a:extLst>
               <a:ext uri="{FF2B5EF4-FFF2-40B4-BE49-F238E27FC236}">
@@ -9799,6 +10736,31 @@
               <a:rPr lang="en-US"/>
               <a:t>January 2026</a:t>
             </a:r>
+          </a:p>
+        </p:txBody>
+      </p:sp>
+      <p:sp>
+        <p:nvSpPr>
+          <p:cNvPr id="5" name="Title 4">
+            <a:extLst>
+              <a:ext uri="{FF2B5EF4-FFF2-40B4-BE49-F238E27FC236}">
+                <a16:creationId xmlns:a16="http://schemas.microsoft.com/office/drawing/2014/main" id="{19FE3266-BEF1-10DA-8F12-622D82F0D88F}"/>
+              </a:ext>
+            </a:extLst>
+          </p:cNvPr>
+          <p:cNvSpPr>
+            <a:spLocks noGrp="1"/>
+          </p:cNvSpPr>
+          <p:nvPr>
+            <p:ph type="ctrTitle"/>
+          </p:nvPr>
+        </p:nvSpPr>
+        <p:spPr/>
+        <p:txBody>
+          <a:bodyPr/>
+          <a:lstStyle/>
+          <a:p>
+            <a:endParaRPr lang="en-US"/>
           </a:p>
         </p:txBody>
       </p:sp>
@@ -46778,15 +47740,6 @@
 </file>
 
 <file path=customXml/item1.xml><?xml version="1.0" encoding="utf-8"?>
-<?mso-contentType ?>
-<FormTemplates xmlns="http://schemas.microsoft.com/sharepoint/v3/contenttype/forms">
-  <Display>DocumentLibraryForm</Display>
-  <Edit>DocumentLibraryForm</Edit>
-  <New>DocumentLibraryForm</New>
-</FormTemplates>
-</file>
-
-<file path=customXml/item2.xml><?xml version="1.0" encoding="utf-8"?>
 <p:properties xmlns:p="http://schemas.microsoft.com/office/2006/metadata/properties" xmlns:xsi="http://www.w3.org/2001/XMLSchema-instance" xmlns:pc="http://schemas.microsoft.com/office/infopath/2007/PartnerControls">
   <documentManagement>
     <DocumentType xmlns="8f19d6cc-6494-4616-8167-f1dfcac21974" xsi:nil="true"/>
@@ -46801,7 +47754,7 @@
 </p:properties>
 </file>
 
-<file path=customXml/item3.xml><?xml version="1.0" encoding="utf-8"?>
+<file path=customXml/item2.xml><?xml version="1.0" encoding="utf-8"?>
 <ct:contentTypeSchema xmlns:ct="http://schemas.microsoft.com/office/2006/metadata/contentType" xmlns:ma="http://schemas.microsoft.com/office/2006/metadata/properties/metaAttributes" ct:_="" ma:_="" ma:contentTypeName="Document" ma:contentTypeID="0x010100C45A32F96DB25E4AB76F4C8D3C46A65D" ma:contentTypeVersion="41" ma:contentTypeDescription="Create a new document." ma:contentTypeScope="" ma:versionID="d62dd5d70889e22cd72b93ed2de4c522">
   <xsd:schema xmlns:xsd="http://www.w3.org/2001/XMLSchema" xmlns:xs="http://www.w3.org/2001/XMLSchema" xmlns:p="http://schemas.microsoft.com/office/2006/metadata/properties" xmlns:ns2="8f19d6cc-6494-4616-8167-f1dfcac21974" xmlns:ns3="d0cd46e7-77f4-422c-81f5-f6ec011b6e79" xmlns:ns4="98180f0f-5ea0-4595-8a0b-06fcb685faaa" targetNamespace="http://schemas.microsoft.com/office/2006/metadata/properties" ma:root="true" ma:fieldsID="fc649ffeb0cbb6ece1b2940e5e25b875" ns2:_="" ns3:_="" ns4:_="">
     <xsd:import namespace="8f19d6cc-6494-4616-8167-f1dfcac21974"/>
@@ -47081,15 +48034,16 @@
 </ct:contentTypeSchema>
 </file>
 
-<file path=customXml/itemProps1.xml><?xml version="1.0" encoding="utf-8"?>
-<ds:datastoreItem xmlns:ds="http://schemas.openxmlformats.org/officeDocument/2006/customXml" ds:itemID="{04C4685E-11DE-47BE-B63C-CA6899C54724}">
-  <ds:schemaRefs>
-    <ds:schemaRef ds:uri="http://schemas.microsoft.com/sharepoint/v3/contenttype/forms"/>
-  </ds:schemaRefs>
-</ds:datastoreItem>
+<file path=customXml/item3.xml><?xml version="1.0" encoding="utf-8"?>
+<?mso-contentType ?>
+<FormTemplates xmlns="http://schemas.microsoft.com/sharepoint/v3/contenttype/forms">
+  <Display>DocumentLibraryForm</Display>
+  <Edit>DocumentLibraryForm</Edit>
+  <New>DocumentLibraryForm</New>
+</FormTemplates>
 </file>
 
-<file path=customXml/itemProps2.xml><?xml version="1.0" encoding="utf-8"?>
+<file path=customXml/itemProps1.xml><?xml version="1.0" encoding="utf-8"?>
 <ds:datastoreItem xmlns:ds="http://schemas.openxmlformats.org/officeDocument/2006/customXml" ds:itemID="{B14D1754-E1EB-4F78-9D58-4711595F26EC}">
   <ds:schemaRefs>
     <ds:schemaRef ds:uri="http://schemas.microsoft.com/office/2006/documentManagement/types"/>
@@ -47107,7 +48061,7 @@
 </ds:datastoreItem>
 </file>
 
-<file path=customXml/itemProps3.xml><?xml version="1.0" encoding="utf-8"?>
+<file path=customXml/itemProps2.xml><?xml version="1.0" encoding="utf-8"?>
 <ds:datastoreItem xmlns:ds="http://schemas.openxmlformats.org/officeDocument/2006/customXml" ds:itemID="{244A8D52-CAC9-469F-B1B1-8A41D030576D}">
   <ds:schemaRefs>
     <ds:schemaRef ds:uri="http://schemas.microsoft.com/office/2006/metadata/contentType"/>
@@ -47125,4 +48079,12 @@
     <ds:schemaRef ds:uri="http://schemas.microsoft.com/internal/obd"/>
   </ds:schemaRefs>
 </ds:datastoreItem>
+</file>
+
+<file path=customXml/itemProps3.xml><?xml version="1.0" encoding="utf-8"?>
+<ds:datastoreItem xmlns:ds="http://schemas.openxmlformats.org/officeDocument/2006/customXml" ds:itemID="{04C4685E-11DE-47BE-B63C-CA6899C54724}">
+  <ds:schemaRefs>
+    <ds:schemaRef ds:uri="http://schemas.microsoft.com/sharepoint/v3/contenttype/forms"/>
+  </ds:schemaRefs>
+</ds:datastoreItem>
 </file>